--- a/templates/process/process_5step_A.pptx
+++ b/templates/process/process_5step_A.pptx
@@ -3098,45 +3098,40 @@
       <p:grpSpPr/>
       <p:sp>
         <p:nvSpPr>
-          <p:cNvPr id="2" name="Rectangle 1"/>
-          <p:cNvSpPr/>
+          <p:cNvPr id="2" name="TextBox 1"/>
+          <p:cNvSpPr txBox="1"/>
           <p:nvPr/>
         </p:nvSpPr>
         <p:spPr>
           <a:xfrm>
-            <a:off x="0" y="0"/>
-            <a:ext cx="7560000" cy="720000"/>
+            <a:off x="432000" y="324000"/>
+            <a:ext cx="6696000" cy="396000"/>
           </a:xfrm>
           <a:prstGeom prst="rect">
             <a:avLst/>
           </a:prstGeom>
-          <a:solidFill>
-            <a:srgbClr val="122242"/>
-          </a:solidFill>
-          <a:ln>
-            <a:noFill/>
-          </a:ln>
-          <a:effectLst/>
+          <a:noFill/>
         </p:spPr>
-        <p:style>
-          <a:lnRef idx="1">
-            <a:schemeClr val="accent1"/>
-          </a:lnRef>
-          <a:fillRef idx="3">
-            <a:schemeClr val="accent1"/>
-          </a:fillRef>
-          <a:effectRef idx="2">
-            <a:schemeClr val="accent1"/>
-          </a:effectRef>
-          <a:fontRef idx="minor">
-            <a:schemeClr val="lt1"/>
-          </a:fontRef>
-        </p:style>
-        <p:txBody>
-          <a:bodyPr rtlCol="0" anchor="ctr"/>
+        <p:txBody>
+          <a:bodyPr wrap="square" anchor="t" lIns="0" rIns="0" tIns="0" bIns="0">
+            <a:spAutoFit/>
+          </a:bodyPr>
           <a:lstStyle/>
           <a:p>
-            <a:pPr algn="ctr"/>
+            <a:pPr algn="l">
+              <a:lnSpc>
+                <a:spcPct val="115000"/>
+              </a:lnSpc>
+            </a:pPr>
+            <a:r>
+              <a:rPr sz="1900" b="1">
+                <a:solidFill>
+                  <a:srgbClr val="122242"/>
+                </a:solidFill>
+                <a:latin typeface="맑은 고딕"/>
+              </a:rPr>
+              <a:t>{{PAGE_TITLE}}</a:t>
+            </a:r>
           </a:p>
         </p:txBody>
       </p:sp>
@@ -3148,8 +3143,8 @@
         </p:nvSpPr>
         <p:spPr>
           <a:xfrm>
-            <a:off x="0" y="720000"/>
-            <a:ext cx="7560000" cy="27940"/>
+            <a:off x="432000" y="738000"/>
+            <a:ext cx="504000" cy="30480"/>
           </a:xfrm>
           <a:prstGeom prst="rect">
             <a:avLst/>
@@ -3184,196 +3179,30 @@
           </a:p>
         </p:txBody>
       </p:sp>
-      <p:sp>
-        <p:nvSpPr>
-          <p:cNvPr id="4" name="TextBox 3"/>
-          <p:cNvSpPr txBox="1"/>
-          <p:nvPr/>
-        </p:nvSpPr>
-        <p:spPr>
-          <a:xfrm>
-            <a:off x="432000" y="126000"/>
-            <a:ext cx="6696000" cy="468000"/>
-          </a:xfrm>
-          <a:prstGeom prst="rect">
-            <a:avLst/>
-          </a:prstGeom>
-          <a:noFill/>
-        </p:spPr>
-        <p:txBody>
-          <a:bodyPr wrap="square" anchor="ctr" lIns="0" rIns="0" tIns="0" bIns="0">
-            <a:spAutoFit/>
-          </a:bodyPr>
-          <a:lstStyle/>
-          <a:p>
-            <a:pPr algn="l">
-              <a:lnSpc>
-                <a:spcPct val="115000"/>
-              </a:lnSpc>
-            </a:pPr>
-            <a:r>
-              <a:rPr sz="2200" b="1">
-                <a:solidFill>
-                  <a:srgbClr val="FFFFFF"/>
-                </a:solidFill>
-                <a:latin typeface="맑은 고딕"/>
-              </a:rPr>
-              <a:t>{{PAGE_TITLE}}</a:t>
-            </a:r>
-          </a:p>
-        </p:txBody>
-      </p:sp>
-      <p:sp>
-        <p:nvSpPr>
-          <p:cNvPr id="5" name="TextBox 4"/>
-          <p:cNvSpPr txBox="1"/>
-          <p:nvPr/>
-        </p:nvSpPr>
-        <p:spPr>
-          <a:xfrm>
-            <a:off x="6480000" y="10260000"/>
-            <a:ext cx="720000" cy="288000"/>
-          </a:xfrm>
-          <a:prstGeom prst="rect">
-            <a:avLst/>
-          </a:prstGeom>
-          <a:noFill/>
-        </p:spPr>
-        <p:txBody>
-          <a:bodyPr wrap="square" anchor="t" lIns="0" rIns="0" tIns="0" bIns="0">
-            <a:spAutoFit/>
-          </a:bodyPr>
-          <a:lstStyle/>
-          <a:p>
-            <a:pPr algn="r">
-              <a:lnSpc>
-                <a:spcPct val="115000"/>
-              </a:lnSpc>
-            </a:pPr>
-            <a:r>
-              <a:rPr sz="900" b="0">
-                <a:solidFill>
-                  <a:srgbClr val="969BA5"/>
-                </a:solidFill>
-                <a:latin typeface="맑은 고딕"/>
-              </a:rPr>
-              <a:t>02</a:t>
-            </a:r>
-          </a:p>
-        </p:txBody>
-      </p:sp>
-      <p:sp>
-        <p:nvSpPr>
-          <p:cNvPr id="6" name="Rectangle 5"/>
-          <p:cNvSpPr/>
-          <p:nvPr/>
-        </p:nvSpPr>
-        <p:spPr>
-          <a:xfrm>
-            <a:off x="615600" y="1188000"/>
-            <a:ext cx="28800" cy="8856000"/>
-          </a:xfrm>
-          <a:prstGeom prst="rect">
-            <a:avLst/>
-          </a:prstGeom>
-          <a:solidFill>
-            <a:srgbClr val="F1F2F5"/>
-          </a:solidFill>
-          <a:ln>
-            <a:noFill/>
-          </a:ln>
-          <a:effectLst/>
-        </p:spPr>
-        <p:style>
-          <a:lnRef idx="1">
-            <a:schemeClr val="accent1"/>
-          </a:lnRef>
-          <a:fillRef idx="3">
-            <a:schemeClr val="accent1"/>
-          </a:fillRef>
-          <a:effectRef idx="2">
-            <a:schemeClr val="accent1"/>
-          </a:effectRef>
-          <a:fontRef idx="minor">
-            <a:schemeClr val="lt1"/>
-          </a:fontRef>
-        </p:style>
-        <p:txBody>
-          <a:bodyPr rtlCol="0" anchor="ctr"/>
-          <a:lstStyle/>
-          <a:p>
-            <a:pPr algn="ctr"/>
-          </a:p>
-        </p:txBody>
-      </p:sp>
       <p:grpSp>
         <p:nvGrpSpPr>
-          <p:cNvPr id="12" name="GROUP_STEP_1"/>
+          <p:cNvPr id="9" name="GROUP_STEP_1"/>
           <p:cNvGrpSpPr/>
           <p:nvPr/>
         </p:nvGrpSpPr>
         <p:grpSpPr>
           <a:xfrm>
-            <a:off x="432000" y="1008000"/>
-            <a:ext cx="6696000" cy="1749600"/>
-            <a:chOff x="432000" y="1008000"/>
-            <a:chExt cx="6696000" cy="1749600"/>
+            <a:off x="432000" y="900000"/>
+            <a:ext cx="6696000" cy="1872000"/>
+            <a:chOff x="432000" y="900000"/>
+            <a:chExt cx="6696000" cy="1872000"/>
           </a:xfrm>
         </p:grpSpPr>
         <p:sp>
           <p:nvSpPr>
-            <p:cNvPr id="7" name="Rectangle 6"/>
-            <p:cNvSpPr/>
-            <p:nvPr/>
-          </p:nvSpPr>
-          <p:spPr>
-            <a:xfrm>
-              <a:off x="432000" y="1044000"/>
-              <a:ext cx="396000" cy="396000"/>
-            </a:xfrm>
-            <a:prstGeom prst="rect">
-              <a:avLst/>
-            </a:prstGeom>
-            <a:solidFill>
-              <a:srgbClr val="122242"/>
-            </a:solidFill>
-            <a:ln>
-              <a:noFill/>
-            </a:ln>
-            <a:effectLst/>
-          </p:spPr>
-          <p:style>
-            <a:lnRef idx="1">
-              <a:schemeClr val="accent1"/>
-            </a:lnRef>
-            <a:fillRef idx="3">
-              <a:schemeClr val="accent1"/>
-            </a:fillRef>
-            <a:effectRef idx="2">
-              <a:schemeClr val="accent1"/>
-            </a:effectRef>
-            <a:fontRef idx="minor">
-              <a:schemeClr val="lt1"/>
-            </a:fontRef>
-          </p:style>
-          <p:txBody>
-            <a:bodyPr rtlCol="0" anchor="ctr"/>
-            <a:lstStyle/>
-            <a:p>
-              <a:pPr algn="ctr"/>
-            </a:p>
-          </p:txBody>
-        </p:sp>
-        <p:sp>
-          <p:nvSpPr>
-            <p:cNvPr id="8" name="TextBox 7"/>
+            <p:cNvPr id="4" name="TextBox 3"/>
             <p:cNvSpPr txBox="1"/>
             <p:nvPr/>
           </p:nvSpPr>
           <p:spPr>
             <a:xfrm>
-              <a:off x="432000" y="1044000"/>
-              <a:ext cx="396000" cy="396000"/>
+              <a:off x="432000" y="900000"/>
+              <a:ext cx="540000" cy="468000"/>
             </a:xfrm>
             <a:prstGeom prst="rect">
               <a:avLst/>
@@ -3381,38 +3210,38 @@
             <a:noFill/>
           </p:spPr>
           <p:txBody>
-            <a:bodyPr wrap="square" anchor="ctr" lIns="0" rIns="0" tIns="0" bIns="0">
+            <a:bodyPr wrap="square" anchor="t" lIns="0" rIns="0" tIns="0" bIns="0">
               <a:spAutoFit/>
             </a:bodyPr>
             <a:lstStyle/>
             <a:p>
-              <a:pPr algn="ctr">
+              <a:pPr algn="l">
                 <a:lnSpc>
                   <a:spcPct val="115000"/>
                 </a:lnSpc>
               </a:pPr>
               <a:r>
-                <a:rPr sz="1300" b="1">
+                <a:rPr sz="2200" b="1">
                   <a:solidFill>
-                    <a:srgbClr val="FFFFFF"/>
+                    <a:srgbClr val="DEE2E9"/>
                   </a:solidFill>
                   <a:latin typeface="맑은 고딕"/>
                 </a:rPr>
-                <a:t>1</a:t>
+                <a:t>01</a:t>
               </a:r>
             </a:p>
           </p:txBody>
         </p:sp>
         <p:sp>
           <p:nvSpPr>
-            <p:cNvPr id="9" name="PHOTO_1"/>
+            <p:cNvPr id="5" name="PHOTO_1"/>
             <p:cNvSpPr/>
             <p:nvPr/>
           </p:nvSpPr>
           <p:spPr>
             <a:xfrm>
-              <a:off x="1008000" y="1008000"/>
-              <a:ext cx="2088000" cy="1641600"/>
+              <a:off x="972000" y="936000"/>
+              <a:ext cx="1656000" cy="1656000"/>
             </a:xfrm>
             <a:prstGeom prst="rect">
               <a:avLst/>
@@ -3449,14 +3278,14 @@
         </p:sp>
         <p:sp>
           <p:nvSpPr>
-            <p:cNvPr id="10" name="TextBox 9"/>
+            <p:cNvPr id="6" name="TextBox 5"/>
             <p:cNvSpPr txBox="1"/>
             <p:nvPr/>
           </p:nvSpPr>
           <p:spPr>
             <a:xfrm>
-              <a:off x="3312000" y="1044000"/>
-              <a:ext cx="3816000" cy="324000"/>
+              <a:off x="2880000" y="972000"/>
+              <a:ext cx="4248000" cy="324000"/>
             </a:xfrm>
             <a:prstGeom prst="rect">
               <a:avLst/>
@@ -3488,14 +3317,14 @@
         </p:sp>
         <p:sp>
           <p:nvSpPr>
-            <p:cNvPr id="11" name="TextBox 10"/>
+            <p:cNvPr id="7" name="TextBox 6"/>
             <p:cNvSpPr txBox="1"/>
             <p:nvPr/>
           </p:nvSpPr>
           <p:spPr>
             <a:xfrm>
-              <a:off x="3312000" y="1404000"/>
-              <a:ext cx="3816000" cy="1353600"/>
+              <a:off x="2880000" y="1332000"/>
+              <a:ext cx="4248000" cy="1332000"/>
             </a:xfrm>
             <a:prstGeom prst="rect">
               <a:avLst/>
@@ -3525,75 +3354,16 @@
             </a:p>
           </p:txBody>
         </p:sp>
-      </p:grpSp>
-      <p:grpSp>
-        <p:nvGrpSpPr>
-          <p:cNvPr id="18" name="GROUP_STEP_2"/>
-          <p:cNvGrpSpPr/>
-          <p:nvPr/>
-        </p:nvGrpSpPr>
-        <p:grpSpPr>
-          <a:xfrm>
-            <a:off x="432000" y="2865600"/>
-            <a:ext cx="6696000" cy="1749600"/>
-            <a:chOff x="432000" y="2865600"/>
-            <a:chExt cx="6696000" cy="1749600"/>
-          </a:xfrm>
-        </p:grpSpPr>
         <p:sp>
           <p:nvSpPr>
-            <p:cNvPr id="13" name="Rectangle 12"/>
-            <p:cNvSpPr/>
-            <p:nvPr/>
-          </p:nvSpPr>
-          <p:spPr>
-            <a:xfrm>
-              <a:off x="432000" y="2901600"/>
-              <a:ext cx="396000" cy="396000"/>
-            </a:xfrm>
-            <a:prstGeom prst="rect">
-              <a:avLst/>
-            </a:prstGeom>
-            <a:solidFill>
-              <a:srgbClr val="122242"/>
-            </a:solidFill>
-            <a:ln>
-              <a:noFill/>
-            </a:ln>
-            <a:effectLst/>
-          </p:spPr>
-          <p:style>
-            <a:lnRef idx="1">
-              <a:schemeClr val="accent1"/>
-            </a:lnRef>
-            <a:fillRef idx="3">
-              <a:schemeClr val="accent1"/>
-            </a:fillRef>
-            <a:effectRef idx="2">
-              <a:schemeClr val="accent1"/>
-            </a:effectRef>
-            <a:fontRef idx="minor">
-              <a:schemeClr val="lt1"/>
-            </a:fontRef>
-          </p:style>
-          <p:txBody>
-            <a:bodyPr rtlCol="0" anchor="ctr"/>
-            <a:lstStyle/>
-            <a:p>
-              <a:pPr algn="ctr"/>
-            </a:p>
-          </p:txBody>
-        </p:sp>
-        <p:sp>
-          <p:nvSpPr>
-            <p:cNvPr id="14" name="TextBox 13"/>
+            <p:cNvPr id="8" name="TextBox 7"/>
             <p:cNvSpPr txBox="1"/>
             <p:nvPr/>
           </p:nvSpPr>
           <p:spPr>
             <a:xfrm>
-              <a:off x="432000" y="2901600"/>
-              <a:ext cx="396000" cy="396000"/>
+              <a:off x="504000" y="2592000"/>
+              <a:ext cx="396000" cy="180000"/>
             </a:xfrm>
             <a:prstGeom prst="rect">
               <a:avLst/>
@@ -3612,27 +3382,81 @@
                 </a:lnSpc>
               </a:pPr>
               <a:r>
-                <a:rPr sz="1300" b="1">
+                <a:rPr sz="1200" b="1">
                   <a:solidFill>
-                    <a:srgbClr val="FFFFFF"/>
+                    <a:srgbClr val="B08D57"/>
                   </a:solidFill>
                   <a:latin typeface="맑은 고딕"/>
                 </a:rPr>
-                <a:t>2</a:t>
+                <a:t>↓</a:t>
+              </a:r>
+            </a:p>
+          </p:txBody>
+        </p:sp>
+      </p:grpSp>
+      <p:grpSp>
+        <p:nvGrpSpPr>
+          <p:cNvPr id="15" name="GROUP_STEP_2"/>
+          <p:cNvGrpSpPr/>
+          <p:nvPr/>
+        </p:nvGrpSpPr>
+        <p:grpSpPr>
+          <a:xfrm>
+            <a:off x="432000" y="2772000"/>
+            <a:ext cx="6696000" cy="1872000"/>
+            <a:chOff x="432000" y="2772000"/>
+            <a:chExt cx="6696000" cy="1872000"/>
+          </a:xfrm>
+        </p:grpSpPr>
+        <p:sp>
+          <p:nvSpPr>
+            <p:cNvPr id="10" name="TextBox 9"/>
+            <p:cNvSpPr txBox="1"/>
+            <p:nvPr/>
+          </p:nvSpPr>
+          <p:spPr>
+            <a:xfrm>
+              <a:off x="432000" y="2772000"/>
+              <a:ext cx="540000" cy="468000"/>
+            </a:xfrm>
+            <a:prstGeom prst="rect">
+              <a:avLst/>
+            </a:prstGeom>
+            <a:noFill/>
+          </p:spPr>
+          <p:txBody>
+            <a:bodyPr wrap="square" anchor="t" lIns="0" rIns="0" tIns="0" bIns="0">
+              <a:spAutoFit/>
+            </a:bodyPr>
+            <a:lstStyle/>
+            <a:p>
+              <a:pPr algn="l">
+                <a:lnSpc>
+                  <a:spcPct val="115000"/>
+                </a:lnSpc>
+              </a:pPr>
+              <a:r>
+                <a:rPr sz="2200" b="1">
+                  <a:solidFill>
+                    <a:srgbClr val="DEE2E9"/>
+                  </a:solidFill>
+                  <a:latin typeface="맑은 고딕"/>
+                </a:rPr>
+                <a:t>02</a:t>
               </a:r>
             </a:p>
           </p:txBody>
         </p:sp>
         <p:sp>
           <p:nvSpPr>
-            <p:cNvPr id="15" name="PHOTO_2"/>
+            <p:cNvPr id="11" name="PHOTO_2"/>
             <p:cNvSpPr/>
             <p:nvPr/>
           </p:nvSpPr>
           <p:spPr>
             <a:xfrm>
-              <a:off x="1008000" y="2865600"/>
-              <a:ext cx="2088000" cy="1641600"/>
+              <a:off x="972000" y="2808000"/>
+              <a:ext cx="1656000" cy="1656000"/>
             </a:xfrm>
             <a:prstGeom prst="rect">
               <a:avLst/>
@@ -3669,14 +3493,14 @@
         </p:sp>
         <p:sp>
           <p:nvSpPr>
-            <p:cNvPr id="16" name="TextBox 15"/>
+            <p:cNvPr id="12" name="TextBox 11"/>
             <p:cNvSpPr txBox="1"/>
             <p:nvPr/>
           </p:nvSpPr>
           <p:spPr>
             <a:xfrm>
-              <a:off x="3312000" y="2901600"/>
-              <a:ext cx="3816000" cy="324000"/>
+              <a:off x="2880000" y="2844000"/>
+              <a:ext cx="4248000" cy="324000"/>
             </a:xfrm>
             <a:prstGeom prst="rect">
               <a:avLst/>
@@ -3708,14 +3532,14 @@
         </p:sp>
         <p:sp>
           <p:nvSpPr>
-            <p:cNvPr id="17" name="TextBox 16"/>
+            <p:cNvPr id="13" name="TextBox 12"/>
             <p:cNvSpPr txBox="1"/>
             <p:nvPr/>
           </p:nvSpPr>
           <p:spPr>
             <a:xfrm>
-              <a:off x="3312000" y="3261600"/>
-              <a:ext cx="3816000" cy="1353600"/>
+              <a:off x="2880000" y="3204000"/>
+              <a:ext cx="4248000" cy="1332000"/>
             </a:xfrm>
             <a:prstGeom prst="rect">
               <a:avLst/>
@@ -3745,75 +3569,16 @@
             </a:p>
           </p:txBody>
         </p:sp>
-      </p:grpSp>
-      <p:grpSp>
-        <p:nvGrpSpPr>
-          <p:cNvPr id="24" name="GROUP_STEP_3"/>
-          <p:cNvGrpSpPr/>
-          <p:nvPr/>
-        </p:nvGrpSpPr>
-        <p:grpSpPr>
-          <a:xfrm>
-            <a:off x="432000" y="4723200"/>
-            <a:ext cx="6696000" cy="1749600"/>
-            <a:chOff x="432000" y="4723200"/>
-            <a:chExt cx="6696000" cy="1749600"/>
-          </a:xfrm>
-        </p:grpSpPr>
         <p:sp>
           <p:nvSpPr>
-            <p:cNvPr id="19" name="Rectangle 18"/>
-            <p:cNvSpPr/>
-            <p:nvPr/>
-          </p:nvSpPr>
-          <p:spPr>
-            <a:xfrm>
-              <a:off x="432000" y="4759200"/>
-              <a:ext cx="396000" cy="396000"/>
-            </a:xfrm>
-            <a:prstGeom prst="rect">
-              <a:avLst/>
-            </a:prstGeom>
-            <a:solidFill>
-              <a:srgbClr val="122242"/>
-            </a:solidFill>
-            <a:ln>
-              <a:noFill/>
-            </a:ln>
-            <a:effectLst/>
-          </p:spPr>
-          <p:style>
-            <a:lnRef idx="1">
-              <a:schemeClr val="accent1"/>
-            </a:lnRef>
-            <a:fillRef idx="3">
-              <a:schemeClr val="accent1"/>
-            </a:fillRef>
-            <a:effectRef idx="2">
-              <a:schemeClr val="accent1"/>
-            </a:effectRef>
-            <a:fontRef idx="minor">
-              <a:schemeClr val="lt1"/>
-            </a:fontRef>
-          </p:style>
-          <p:txBody>
-            <a:bodyPr rtlCol="0" anchor="ctr"/>
-            <a:lstStyle/>
-            <a:p>
-              <a:pPr algn="ctr"/>
-            </a:p>
-          </p:txBody>
-        </p:sp>
-        <p:sp>
-          <p:nvSpPr>
-            <p:cNvPr id="20" name="TextBox 19"/>
+            <p:cNvPr id="14" name="TextBox 13"/>
             <p:cNvSpPr txBox="1"/>
             <p:nvPr/>
           </p:nvSpPr>
           <p:spPr>
             <a:xfrm>
-              <a:off x="432000" y="4759200"/>
-              <a:ext cx="396000" cy="396000"/>
+              <a:off x="504000" y="4464000"/>
+              <a:ext cx="396000" cy="180000"/>
             </a:xfrm>
             <a:prstGeom prst="rect">
               <a:avLst/>
@@ -3832,27 +3597,81 @@
                 </a:lnSpc>
               </a:pPr>
               <a:r>
-                <a:rPr sz="1300" b="1">
+                <a:rPr sz="1200" b="1">
                   <a:solidFill>
-                    <a:srgbClr val="FFFFFF"/>
+                    <a:srgbClr val="B08D57"/>
                   </a:solidFill>
                   <a:latin typeface="맑은 고딕"/>
                 </a:rPr>
-                <a:t>3</a:t>
+                <a:t>↓</a:t>
+              </a:r>
+            </a:p>
+          </p:txBody>
+        </p:sp>
+      </p:grpSp>
+      <p:grpSp>
+        <p:nvGrpSpPr>
+          <p:cNvPr id="21" name="GROUP_STEP_3"/>
+          <p:cNvGrpSpPr/>
+          <p:nvPr/>
+        </p:nvGrpSpPr>
+        <p:grpSpPr>
+          <a:xfrm>
+            <a:off x="432000" y="4644000"/>
+            <a:ext cx="6696000" cy="1872000"/>
+            <a:chOff x="432000" y="4644000"/>
+            <a:chExt cx="6696000" cy="1872000"/>
+          </a:xfrm>
+        </p:grpSpPr>
+        <p:sp>
+          <p:nvSpPr>
+            <p:cNvPr id="16" name="TextBox 15"/>
+            <p:cNvSpPr txBox="1"/>
+            <p:nvPr/>
+          </p:nvSpPr>
+          <p:spPr>
+            <a:xfrm>
+              <a:off x="432000" y="4644000"/>
+              <a:ext cx="540000" cy="468000"/>
+            </a:xfrm>
+            <a:prstGeom prst="rect">
+              <a:avLst/>
+            </a:prstGeom>
+            <a:noFill/>
+          </p:spPr>
+          <p:txBody>
+            <a:bodyPr wrap="square" anchor="t" lIns="0" rIns="0" tIns="0" bIns="0">
+              <a:spAutoFit/>
+            </a:bodyPr>
+            <a:lstStyle/>
+            <a:p>
+              <a:pPr algn="l">
+                <a:lnSpc>
+                  <a:spcPct val="115000"/>
+                </a:lnSpc>
+              </a:pPr>
+              <a:r>
+                <a:rPr sz="2200" b="1">
+                  <a:solidFill>
+                    <a:srgbClr val="DEE2E9"/>
+                  </a:solidFill>
+                  <a:latin typeface="맑은 고딕"/>
+                </a:rPr>
+                <a:t>03</a:t>
               </a:r>
             </a:p>
           </p:txBody>
         </p:sp>
         <p:sp>
           <p:nvSpPr>
-            <p:cNvPr id="21" name="PHOTO_3"/>
+            <p:cNvPr id="17" name="PHOTO_3"/>
             <p:cNvSpPr/>
             <p:nvPr/>
           </p:nvSpPr>
           <p:spPr>
             <a:xfrm>
-              <a:off x="1008000" y="4723200"/>
-              <a:ext cx="2088000" cy="1641600"/>
+              <a:off x="972000" y="4680000"/>
+              <a:ext cx="1656000" cy="1656000"/>
             </a:xfrm>
             <a:prstGeom prst="rect">
               <a:avLst/>
@@ -3889,14 +3708,14 @@
         </p:sp>
         <p:sp>
           <p:nvSpPr>
-            <p:cNvPr id="22" name="TextBox 21"/>
+            <p:cNvPr id="18" name="TextBox 17"/>
             <p:cNvSpPr txBox="1"/>
             <p:nvPr/>
           </p:nvSpPr>
           <p:spPr>
             <a:xfrm>
-              <a:off x="3312000" y="4759200"/>
-              <a:ext cx="3816000" cy="324000"/>
+              <a:off x="2880000" y="4716000"/>
+              <a:ext cx="4248000" cy="324000"/>
             </a:xfrm>
             <a:prstGeom prst="rect">
               <a:avLst/>
@@ -3928,14 +3747,14 @@
         </p:sp>
         <p:sp>
           <p:nvSpPr>
-            <p:cNvPr id="23" name="TextBox 22"/>
+            <p:cNvPr id="19" name="TextBox 18"/>
             <p:cNvSpPr txBox="1"/>
             <p:nvPr/>
           </p:nvSpPr>
           <p:spPr>
             <a:xfrm>
-              <a:off x="3312000" y="5119200"/>
-              <a:ext cx="3816000" cy="1353600"/>
+              <a:off x="2880000" y="5076000"/>
+              <a:ext cx="4248000" cy="1332000"/>
             </a:xfrm>
             <a:prstGeom prst="rect">
               <a:avLst/>
@@ -3965,75 +3784,16 @@
             </a:p>
           </p:txBody>
         </p:sp>
-      </p:grpSp>
-      <p:grpSp>
-        <p:nvGrpSpPr>
-          <p:cNvPr id="30" name="GROUP_STEP_4"/>
-          <p:cNvGrpSpPr/>
-          <p:nvPr/>
-        </p:nvGrpSpPr>
-        <p:grpSpPr>
-          <a:xfrm>
-            <a:off x="432000" y="6580800"/>
-            <a:ext cx="6696000" cy="1749600"/>
-            <a:chOff x="432000" y="6580800"/>
-            <a:chExt cx="6696000" cy="1749600"/>
-          </a:xfrm>
-        </p:grpSpPr>
         <p:sp>
           <p:nvSpPr>
-            <p:cNvPr id="25" name="Rectangle 24"/>
-            <p:cNvSpPr/>
-            <p:nvPr/>
-          </p:nvSpPr>
-          <p:spPr>
-            <a:xfrm>
-              <a:off x="432000" y="6616800"/>
-              <a:ext cx="396000" cy="396000"/>
-            </a:xfrm>
-            <a:prstGeom prst="rect">
-              <a:avLst/>
-            </a:prstGeom>
-            <a:solidFill>
-              <a:srgbClr val="122242"/>
-            </a:solidFill>
-            <a:ln>
-              <a:noFill/>
-            </a:ln>
-            <a:effectLst/>
-          </p:spPr>
-          <p:style>
-            <a:lnRef idx="1">
-              <a:schemeClr val="accent1"/>
-            </a:lnRef>
-            <a:fillRef idx="3">
-              <a:schemeClr val="accent1"/>
-            </a:fillRef>
-            <a:effectRef idx="2">
-              <a:schemeClr val="accent1"/>
-            </a:effectRef>
-            <a:fontRef idx="minor">
-              <a:schemeClr val="lt1"/>
-            </a:fontRef>
-          </p:style>
-          <p:txBody>
-            <a:bodyPr rtlCol="0" anchor="ctr"/>
-            <a:lstStyle/>
-            <a:p>
-              <a:pPr algn="ctr"/>
-            </a:p>
-          </p:txBody>
-        </p:sp>
-        <p:sp>
-          <p:nvSpPr>
-            <p:cNvPr id="26" name="TextBox 25"/>
+            <p:cNvPr id="20" name="TextBox 19"/>
             <p:cNvSpPr txBox="1"/>
             <p:nvPr/>
           </p:nvSpPr>
           <p:spPr>
             <a:xfrm>
-              <a:off x="432000" y="6616800"/>
-              <a:ext cx="396000" cy="396000"/>
+              <a:off x="504000" y="6336000"/>
+              <a:ext cx="396000" cy="180000"/>
             </a:xfrm>
             <a:prstGeom prst="rect">
               <a:avLst/>
@@ -4052,27 +3812,81 @@
                 </a:lnSpc>
               </a:pPr>
               <a:r>
-                <a:rPr sz="1300" b="1">
+                <a:rPr sz="1200" b="1">
                   <a:solidFill>
-                    <a:srgbClr val="FFFFFF"/>
+                    <a:srgbClr val="B08D57"/>
                   </a:solidFill>
                   <a:latin typeface="맑은 고딕"/>
                 </a:rPr>
-                <a:t>4</a:t>
+                <a:t>↓</a:t>
+              </a:r>
+            </a:p>
+          </p:txBody>
+        </p:sp>
+      </p:grpSp>
+      <p:grpSp>
+        <p:nvGrpSpPr>
+          <p:cNvPr id="27" name="GROUP_STEP_4"/>
+          <p:cNvGrpSpPr/>
+          <p:nvPr/>
+        </p:nvGrpSpPr>
+        <p:grpSpPr>
+          <a:xfrm>
+            <a:off x="432000" y="6516000"/>
+            <a:ext cx="6696000" cy="1872000"/>
+            <a:chOff x="432000" y="6516000"/>
+            <a:chExt cx="6696000" cy="1872000"/>
+          </a:xfrm>
+        </p:grpSpPr>
+        <p:sp>
+          <p:nvSpPr>
+            <p:cNvPr id="22" name="TextBox 21"/>
+            <p:cNvSpPr txBox="1"/>
+            <p:nvPr/>
+          </p:nvSpPr>
+          <p:spPr>
+            <a:xfrm>
+              <a:off x="432000" y="6516000"/>
+              <a:ext cx="540000" cy="468000"/>
+            </a:xfrm>
+            <a:prstGeom prst="rect">
+              <a:avLst/>
+            </a:prstGeom>
+            <a:noFill/>
+          </p:spPr>
+          <p:txBody>
+            <a:bodyPr wrap="square" anchor="t" lIns="0" rIns="0" tIns="0" bIns="0">
+              <a:spAutoFit/>
+            </a:bodyPr>
+            <a:lstStyle/>
+            <a:p>
+              <a:pPr algn="l">
+                <a:lnSpc>
+                  <a:spcPct val="115000"/>
+                </a:lnSpc>
+              </a:pPr>
+              <a:r>
+                <a:rPr sz="2200" b="1">
+                  <a:solidFill>
+                    <a:srgbClr val="DEE2E9"/>
+                  </a:solidFill>
+                  <a:latin typeface="맑은 고딕"/>
+                </a:rPr>
+                <a:t>04</a:t>
               </a:r>
             </a:p>
           </p:txBody>
         </p:sp>
         <p:sp>
           <p:nvSpPr>
-            <p:cNvPr id="27" name="PHOTO_4"/>
+            <p:cNvPr id="23" name="PHOTO_4"/>
             <p:cNvSpPr/>
             <p:nvPr/>
           </p:nvSpPr>
           <p:spPr>
             <a:xfrm>
-              <a:off x="1008000" y="6580800"/>
-              <a:ext cx="2088000" cy="1641600"/>
+              <a:off x="972000" y="6552000"/>
+              <a:ext cx="1656000" cy="1656000"/>
             </a:xfrm>
             <a:prstGeom prst="rect">
               <a:avLst/>
@@ -4109,14 +3923,14 @@
         </p:sp>
         <p:sp>
           <p:nvSpPr>
-            <p:cNvPr id="28" name="TextBox 27"/>
+            <p:cNvPr id="24" name="TextBox 23"/>
             <p:cNvSpPr txBox="1"/>
             <p:nvPr/>
           </p:nvSpPr>
           <p:spPr>
             <a:xfrm>
-              <a:off x="3312000" y="6616800"/>
-              <a:ext cx="3816000" cy="324000"/>
+              <a:off x="2880000" y="6588000"/>
+              <a:ext cx="4248000" cy="324000"/>
             </a:xfrm>
             <a:prstGeom prst="rect">
               <a:avLst/>
@@ -4148,14 +3962,14 @@
         </p:sp>
         <p:sp>
           <p:nvSpPr>
-            <p:cNvPr id="29" name="TextBox 28"/>
+            <p:cNvPr id="25" name="TextBox 24"/>
             <p:cNvSpPr txBox="1"/>
             <p:nvPr/>
           </p:nvSpPr>
           <p:spPr>
             <a:xfrm>
-              <a:off x="3312000" y="6976800"/>
-              <a:ext cx="3816000" cy="1353600"/>
+              <a:off x="2880000" y="6948000"/>
+              <a:ext cx="4248000" cy="1332000"/>
             </a:xfrm>
             <a:prstGeom prst="rect">
               <a:avLst/>
@@ -4185,75 +3999,16 @@
             </a:p>
           </p:txBody>
         </p:sp>
-      </p:grpSp>
-      <p:grpSp>
-        <p:nvGrpSpPr>
-          <p:cNvPr id="36" name="GROUP_STEP_5"/>
-          <p:cNvGrpSpPr/>
-          <p:nvPr/>
-        </p:nvGrpSpPr>
-        <p:grpSpPr>
-          <a:xfrm>
-            <a:off x="432000" y="8438400"/>
-            <a:ext cx="6696000" cy="1749600"/>
-            <a:chOff x="432000" y="8438400"/>
-            <a:chExt cx="6696000" cy="1749600"/>
-          </a:xfrm>
-        </p:grpSpPr>
         <p:sp>
           <p:nvSpPr>
-            <p:cNvPr id="31" name="Rectangle 30"/>
-            <p:cNvSpPr/>
-            <p:nvPr/>
-          </p:nvSpPr>
-          <p:spPr>
-            <a:xfrm>
-              <a:off x="432000" y="8474400"/>
-              <a:ext cx="396000" cy="396000"/>
-            </a:xfrm>
-            <a:prstGeom prst="rect">
-              <a:avLst/>
-            </a:prstGeom>
-            <a:solidFill>
-              <a:srgbClr val="122242"/>
-            </a:solidFill>
-            <a:ln>
-              <a:noFill/>
-            </a:ln>
-            <a:effectLst/>
-          </p:spPr>
-          <p:style>
-            <a:lnRef idx="1">
-              <a:schemeClr val="accent1"/>
-            </a:lnRef>
-            <a:fillRef idx="3">
-              <a:schemeClr val="accent1"/>
-            </a:fillRef>
-            <a:effectRef idx="2">
-              <a:schemeClr val="accent1"/>
-            </a:effectRef>
-            <a:fontRef idx="minor">
-              <a:schemeClr val="lt1"/>
-            </a:fontRef>
-          </p:style>
-          <p:txBody>
-            <a:bodyPr rtlCol="0" anchor="ctr"/>
-            <a:lstStyle/>
-            <a:p>
-              <a:pPr algn="ctr"/>
-            </a:p>
-          </p:txBody>
-        </p:sp>
-        <p:sp>
-          <p:nvSpPr>
-            <p:cNvPr id="32" name="TextBox 31"/>
+            <p:cNvPr id="26" name="TextBox 25"/>
             <p:cNvSpPr txBox="1"/>
             <p:nvPr/>
           </p:nvSpPr>
           <p:spPr>
             <a:xfrm>
-              <a:off x="432000" y="8474400"/>
-              <a:ext cx="396000" cy="396000"/>
+              <a:off x="504000" y="8208000"/>
+              <a:ext cx="396000" cy="180000"/>
             </a:xfrm>
             <a:prstGeom prst="rect">
               <a:avLst/>
@@ -4272,27 +4027,81 @@
                 </a:lnSpc>
               </a:pPr>
               <a:r>
-                <a:rPr sz="1300" b="1">
+                <a:rPr sz="1200" b="1">
                   <a:solidFill>
-                    <a:srgbClr val="FFFFFF"/>
+                    <a:srgbClr val="B08D57"/>
                   </a:solidFill>
                   <a:latin typeface="맑은 고딕"/>
                 </a:rPr>
-                <a:t>5</a:t>
+                <a:t>↓</a:t>
+              </a:r>
+            </a:p>
+          </p:txBody>
+        </p:sp>
+      </p:grpSp>
+      <p:grpSp>
+        <p:nvGrpSpPr>
+          <p:cNvPr id="32" name="GROUP_STEP_5"/>
+          <p:cNvGrpSpPr/>
+          <p:nvPr/>
+        </p:nvGrpSpPr>
+        <p:grpSpPr>
+          <a:xfrm>
+            <a:off x="432000" y="8388000"/>
+            <a:ext cx="6696000" cy="1764000"/>
+            <a:chOff x="432000" y="8388000"/>
+            <a:chExt cx="6696000" cy="1764000"/>
+          </a:xfrm>
+        </p:grpSpPr>
+        <p:sp>
+          <p:nvSpPr>
+            <p:cNvPr id="28" name="TextBox 27"/>
+            <p:cNvSpPr txBox="1"/>
+            <p:nvPr/>
+          </p:nvSpPr>
+          <p:spPr>
+            <a:xfrm>
+              <a:off x="432000" y="8388000"/>
+              <a:ext cx="540000" cy="468000"/>
+            </a:xfrm>
+            <a:prstGeom prst="rect">
+              <a:avLst/>
+            </a:prstGeom>
+            <a:noFill/>
+          </p:spPr>
+          <p:txBody>
+            <a:bodyPr wrap="square" anchor="t" lIns="0" rIns="0" tIns="0" bIns="0">
+              <a:spAutoFit/>
+            </a:bodyPr>
+            <a:lstStyle/>
+            <a:p>
+              <a:pPr algn="l">
+                <a:lnSpc>
+                  <a:spcPct val="115000"/>
+                </a:lnSpc>
+              </a:pPr>
+              <a:r>
+                <a:rPr sz="2200" b="1">
+                  <a:solidFill>
+                    <a:srgbClr val="DEE2E9"/>
+                  </a:solidFill>
+                  <a:latin typeface="맑은 고딕"/>
+                </a:rPr>
+                <a:t>05</a:t>
               </a:r>
             </a:p>
           </p:txBody>
         </p:sp>
         <p:sp>
           <p:nvSpPr>
-            <p:cNvPr id="33" name="PHOTO_5"/>
+            <p:cNvPr id="29" name="PHOTO_5"/>
             <p:cNvSpPr/>
             <p:nvPr/>
           </p:nvSpPr>
           <p:spPr>
             <a:xfrm>
-              <a:off x="1008000" y="8438400"/>
-              <a:ext cx="2088000" cy="1641600"/>
+              <a:off x="972000" y="8424000"/>
+              <a:ext cx="1656000" cy="1656000"/>
             </a:xfrm>
             <a:prstGeom prst="rect">
               <a:avLst/>
@@ -4329,14 +4138,14 @@
         </p:sp>
         <p:sp>
           <p:nvSpPr>
-            <p:cNvPr id="34" name="TextBox 33"/>
+            <p:cNvPr id="30" name="TextBox 29"/>
             <p:cNvSpPr txBox="1"/>
             <p:nvPr/>
           </p:nvSpPr>
           <p:spPr>
             <a:xfrm>
-              <a:off x="3312000" y="8474400"/>
-              <a:ext cx="3816000" cy="324000"/>
+              <a:off x="2880000" y="8460000"/>
+              <a:ext cx="4248000" cy="324000"/>
             </a:xfrm>
             <a:prstGeom prst="rect">
               <a:avLst/>
@@ -4368,14 +4177,14 @@
         </p:sp>
         <p:sp>
           <p:nvSpPr>
-            <p:cNvPr id="35" name="TextBox 34"/>
+            <p:cNvPr id="31" name="TextBox 30"/>
             <p:cNvSpPr txBox="1"/>
             <p:nvPr/>
           </p:nvSpPr>
           <p:spPr>
             <a:xfrm>
-              <a:off x="3312000" y="8834400"/>
-              <a:ext cx="3816000" cy="1353600"/>
+              <a:off x="2880000" y="8820000"/>
+              <a:ext cx="4248000" cy="1332000"/>
             </a:xfrm>
             <a:prstGeom prst="rect">
               <a:avLst/>

--- a/templates/process/process_5step_A.pptx
+++ b/templates/process/process_5step_A.pptx
@@ -3098,7 +3098,97 @@
       <p:grpSpPr/>
       <p:sp>
         <p:nvSpPr>
-          <p:cNvPr id="2" name="TextBox 1"/>
+          <p:cNvPr id="2" name="Rectangle 1"/>
+          <p:cNvSpPr/>
+          <p:nvPr/>
+        </p:nvSpPr>
+        <p:spPr>
+          <a:xfrm>
+            <a:off x="0" y="0"/>
+            <a:ext cx="7560000" cy="10692000"/>
+          </a:xfrm>
+          <a:prstGeom prst="rect">
+            <a:avLst/>
+          </a:prstGeom>
+          <a:solidFill>
+            <a:srgbClr val="FAF8F4"/>
+          </a:solidFill>
+          <a:ln>
+            <a:noFill/>
+          </a:ln>
+          <a:effectLst/>
+        </p:spPr>
+        <p:style>
+          <a:lnRef idx="1">
+            <a:schemeClr val="accent1"/>
+          </a:lnRef>
+          <a:fillRef idx="3">
+            <a:schemeClr val="accent1"/>
+          </a:fillRef>
+          <a:effectRef idx="2">
+            <a:schemeClr val="accent1"/>
+          </a:effectRef>
+          <a:fontRef idx="minor">
+            <a:schemeClr val="lt1"/>
+          </a:fontRef>
+        </p:style>
+        <p:txBody>
+          <a:bodyPr rtlCol="0" anchor="ctr"/>
+          <a:lstStyle/>
+          <a:p>
+            <a:pPr algn="ctr"/>
+          </a:p>
+        </p:txBody>
+      </p:sp>
+      <p:sp>
+        <p:nvSpPr>
+          <p:cNvPr id="3" name="Oval 2"/>
+          <p:cNvSpPr/>
+          <p:nvPr/>
+        </p:nvSpPr>
+        <p:spPr>
+          <a:xfrm>
+            <a:off x="-4680000" y="8172000"/>
+            <a:ext cx="7560000" cy="7560000"/>
+          </a:xfrm>
+          <a:prstGeom prst="ellipse">
+            <a:avLst/>
+          </a:prstGeom>
+          <a:solidFill>
+            <a:srgbClr val="C4B28C">
+              <a:alpha val="5000"/>
+            </a:srgbClr>
+          </a:solidFill>
+          <a:ln>
+            <a:noFill/>
+          </a:ln>
+          <a:effectLst/>
+        </p:spPr>
+        <p:style>
+          <a:lnRef idx="1">
+            <a:schemeClr val="accent1"/>
+          </a:lnRef>
+          <a:fillRef idx="3">
+            <a:schemeClr val="accent1"/>
+          </a:fillRef>
+          <a:effectRef idx="2">
+            <a:schemeClr val="accent1"/>
+          </a:effectRef>
+          <a:fontRef idx="minor">
+            <a:schemeClr val="lt1"/>
+          </a:fontRef>
+        </p:style>
+        <p:txBody>
+          <a:bodyPr rtlCol="0" anchor="ctr"/>
+          <a:lstStyle/>
+          <a:p>
+            <a:pPr algn="ctr"/>
+          </a:p>
+        </p:txBody>
+      </p:sp>
+      <p:sp>
+        <p:nvSpPr>
+          <p:cNvPr id="4" name="TextBox 3"/>
           <p:cNvSpPr txBox="1"/>
           <p:nvPr/>
         </p:nvSpPr>
@@ -3137,7 +3227,7 @@
       </p:sp>
       <p:sp>
         <p:nvSpPr>
-          <p:cNvPr id="3" name="Rectangle 2"/>
+          <p:cNvPr id="5" name="Rectangle 4"/>
           <p:cNvSpPr/>
           <p:nvPr/>
         </p:nvSpPr>
@@ -3181,7 +3271,7 @@
       </p:sp>
       <p:grpSp>
         <p:nvGrpSpPr>
-          <p:cNvPr id="9" name="GROUP_STEP_1"/>
+          <p:cNvPr id="11" name="GROUP_STEP_1"/>
           <p:cNvGrpSpPr/>
           <p:nvPr/>
         </p:nvGrpSpPr>
@@ -3195,7 +3285,7 @@
         </p:grpSpPr>
         <p:sp>
           <p:nvSpPr>
-            <p:cNvPr id="4" name="TextBox 3"/>
+            <p:cNvPr id="6" name="TextBox 5"/>
             <p:cNvSpPr txBox="1"/>
             <p:nvPr/>
           </p:nvSpPr>
@@ -3234,7 +3324,7 @@
         </p:sp>
         <p:sp>
           <p:nvSpPr>
-            <p:cNvPr id="5" name="PHOTO_1"/>
+            <p:cNvPr id="7" name="PHOTO_1"/>
             <p:cNvSpPr/>
             <p:nvPr/>
           </p:nvSpPr>
@@ -3278,7 +3368,7 @@
         </p:sp>
         <p:sp>
           <p:nvSpPr>
-            <p:cNvPr id="6" name="TextBox 5"/>
+            <p:cNvPr id="8" name="TextBox 7"/>
             <p:cNvSpPr txBox="1"/>
             <p:nvPr/>
           </p:nvSpPr>
@@ -3317,7 +3407,7 @@
         </p:sp>
         <p:sp>
           <p:nvSpPr>
-            <p:cNvPr id="7" name="TextBox 6"/>
+            <p:cNvPr id="9" name="TextBox 8"/>
             <p:cNvSpPr txBox="1"/>
             <p:nvPr/>
           </p:nvSpPr>
@@ -3356,7 +3446,7 @@
         </p:sp>
         <p:sp>
           <p:nvSpPr>
-            <p:cNvPr id="8" name="TextBox 7"/>
+            <p:cNvPr id="10" name="TextBox 9"/>
             <p:cNvSpPr txBox="1"/>
             <p:nvPr/>
           </p:nvSpPr>
@@ -3396,7 +3486,7 @@
       </p:grpSp>
       <p:grpSp>
         <p:nvGrpSpPr>
-          <p:cNvPr id="15" name="GROUP_STEP_2"/>
+          <p:cNvPr id="17" name="GROUP_STEP_2"/>
           <p:cNvGrpSpPr/>
           <p:nvPr/>
         </p:nvGrpSpPr>
@@ -3410,7 +3500,7 @@
         </p:grpSpPr>
         <p:sp>
           <p:nvSpPr>
-            <p:cNvPr id="10" name="TextBox 9"/>
+            <p:cNvPr id="12" name="TextBox 11"/>
             <p:cNvSpPr txBox="1"/>
             <p:nvPr/>
           </p:nvSpPr>
@@ -3449,7 +3539,7 @@
         </p:sp>
         <p:sp>
           <p:nvSpPr>
-            <p:cNvPr id="11" name="PHOTO_2"/>
+            <p:cNvPr id="13" name="PHOTO_2"/>
             <p:cNvSpPr/>
             <p:nvPr/>
           </p:nvSpPr>
@@ -3493,7 +3583,7 @@
         </p:sp>
         <p:sp>
           <p:nvSpPr>
-            <p:cNvPr id="12" name="TextBox 11"/>
+            <p:cNvPr id="14" name="TextBox 13"/>
             <p:cNvSpPr txBox="1"/>
             <p:nvPr/>
           </p:nvSpPr>
@@ -3532,7 +3622,7 @@
         </p:sp>
         <p:sp>
           <p:nvSpPr>
-            <p:cNvPr id="13" name="TextBox 12"/>
+            <p:cNvPr id="15" name="TextBox 14"/>
             <p:cNvSpPr txBox="1"/>
             <p:nvPr/>
           </p:nvSpPr>
@@ -3571,7 +3661,7 @@
         </p:sp>
         <p:sp>
           <p:nvSpPr>
-            <p:cNvPr id="14" name="TextBox 13"/>
+            <p:cNvPr id="16" name="TextBox 15"/>
             <p:cNvSpPr txBox="1"/>
             <p:nvPr/>
           </p:nvSpPr>
@@ -3611,7 +3701,7 @@
       </p:grpSp>
       <p:grpSp>
         <p:nvGrpSpPr>
-          <p:cNvPr id="21" name="GROUP_STEP_3"/>
+          <p:cNvPr id="23" name="GROUP_STEP_3"/>
           <p:cNvGrpSpPr/>
           <p:nvPr/>
         </p:nvGrpSpPr>
@@ -3625,7 +3715,7 @@
         </p:grpSpPr>
         <p:sp>
           <p:nvSpPr>
-            <p:cNvPr id="16" name="TextBox 15"/>
+            <p:cNvPr id="18" name="TextBox 17"/>
             <p:cNvSpPr txBox="1"/>
             <p:nvPr/>
           </p:nvSpPr>
@@ -3664,7 +3754,7 @@
         </p:sp>
         <p:sp>
           <p:nvSpPr>
-            <p:cNvPr id="17" name="PHOTO_3"/>
+            <p:cNvPr id="19" name="PHOTO_3"/>
             <p:cNvSpPr/>
             <p:nvPr/>
           </p:nvSpPr>
@@ -3708,7 +3798,7 @@
         </p:sp>
         <p:sp>
           <p:nvSpPr>
-            <p:cNvPr id="18" name="TextBox 17"/>
+            <p:cNvPr id="20" name="TextBox 19"/>
             <p:cNvSpPr txBox="1"/>
             <p:nvPr/>
           </p:nvSpPr>
@@ -3747,7 +3837,7 @@
         </p:sp>
         <p:sp>
           <p:nvSpPr>
-            <p:cNvPr id="19" name="TextBox 18"/>
+            <p:cNvPr id="21" name="TextBox 20"/>
             <p:cNvSpPr txBox="1"/>
             <p:nvPr/>
           </p:nvSpPr>
@@ -3786,7 +3876,7 @@
         </p:sp>
         <p:sp>
           <p:nvSpPr>
-            <p:cNvPr id="20" name="TextBox 19"/>
+            <p:cNvPr id="22" name="TextBox 21"/>
             <p:cNvSpPr txBox="1"/>
             <p:nvPr/>
           </p:nvSpPr>
@@ -3826,7 +3916,7 @@
       </p:grpSp>
       <p:grpSp>
         <p:nvGrpSpPr>
-          <p:cNvPr id="27" name="GROUP_STEP_4"/>
+          <p:cNvPr id="29" name="GROUP_STEP_4"/>
           <p:cNvGrpSpPr/>
           <p:nvPr/>
         </p:nvGrpSpPr>
@@ -3840,7 +3930,7 @@
         </p:grpSpPr>
         <p:sp>
           <p:nvSpPr>
-            <p:cNvPr id="22" name="TextBox 21"/>
+            <p:cNvPr id="24" name="TextBox 23"/>
             <p:cNvSpPr txBox="1"/>
             <p:nvPr/>
           </p:nvSpPr>
@@ -3879,7 +3969,7 @@
         </p:sp>
         <p:sp>
           <p:nvSpPr>
-            <p:cNvPr id="23" name="PHOTO_4"/>
+            <p:cNvPr id="25" name="PHOTO_4"/>
             <p:cNvSpPr/>
             <p:nvPr/>
           </p:nvSpPr>
@@ -3923,7 +4013,7 @@
         </p:sp>
         <p:sp>
           <p:nvSpPr>
-            <p:cNvPr id="24" name="TextBox 23"/>
+            <p:cNvPr id="26" name="TextBox 25"/>
             <p:cNvSpPr txBox="1"/>
             <p:nvPr/>
           </p:nvSpPr>
@@ -3962,7 +4052,7 @@
         </p:sp>
         <p:sp>
           <p:nvSpPr>
-            <p:cNvPr id="25" name="TextBox 24"/>
+            <p:cNvPr id="27" name="TextBox 26"/>
             <p:cNvSpPr txBox="1"/>
             <p:nvPr/>
           </p:nvSpPr>
@@ -4001,7 +4091,7 @@
         </p:sp>
         <p:sp>
           <p:nvSpPr>
-            <p:cNvPr id="26" name="TextBox 25"/>
+            <p:cNvPr id="28" name="TextBox 27"/>
             <p:cNvSpPr txBox="1"/>
             <p:nvPr/>
           </p:nvSpPr>
@@ -4041,7 +4131,7 @@
       </p:grpSp>
       <p:grpSp>
         <p:nvGrpSpPr>
-          <p:cNvPr id="32" name="GROUP_STEP_5"/>
+          <p:cNvPr id="34" name="GROUP_STEP_5"/>
           <p:cNvGrpSpPr/>
           <p:nvPr/>
         </p:nvGrpSpPr>
@@ -4055,7 +4145,7 @@
         </p:grpSpPr>
         <p:sp>
           <p:nvSpPr>
-            <p:cNvPr id="28" name="TextBox 27"/>
+            <p:cNvPr id="30" name="TextBox 29"/>
             <p:cNvSpPr txBox="1"/>
             <p:nvPr/>
           </p:nvSpPr>
@@ -4094,7 +4184,7 @@
         </p:sp>
         <p:sp>
           <p:nvSpPr>
-            <p:cNvPr id="29" name="PHOTO_5"/>
+            <p:cNvPr id="31" name="PHOTO_5"/>
             <p:cNvSpPr/>
             <p:nvPr/>
           </p:nvSpPr>
@@ -4138,7 +4228,7 @@
         </p:sp>
         <p:sp>
           <p:nvSpPr>
-            <p:cNvPr id="30" name="TextBox 29"/>
+            <p:cNvPr id="32" name="TextBox 31"/>
             <p:cNvSpPr txBox="1"/>
             <p:nvPr/>
           </p:nvSpPr>
@@ -4177,7 +4267,7 @@
         </p:sp>
         <p:sp>
           <p:nvSpPr>
-            <p:cNvPr id="31" name="TextBox 30"/>
+            <p:cNvPr id="33" name="TextBox 32"/>
             <p:cNvSpPr txBox="1"/>
             <p:nvPr/>
           </p:nvSpPr>
